--- a/Figures/originality/deck.pptx
+++ b/Figures/originality/deck.pptx
@@ -7,6 +7,7 @@
   <p:sldIdLst>
     <p:sldId id="256" r:id="rId2"/>
     <p:sldId id="257" r:id="rId3"/>
+    <p:sldId id="258" r:id="rId4"/>
   </p:sldIdLst>
   <p:sldSz cx="12192000" cy="6858000"/>
   <p:notesSz cx="6858000" cy="9144000"/>
@@ -105,6 +106,11 @@
       </a:defRPr>
     </a:lvl9pPr>
   </p:defaultTextStyle>
+  <p:extLst>
+    <p:ext uri="{EFAFB233-063F-42B5-8137-9DF3F51BA10A}">
+      <p15:sldGuideLst xmlns:p15="http://schemas.microsoft.com/office/powerpoint/2012/main"/>
+    </p:ext>
+  </p:extLst>
 </p:presentation>
 </file>
 
@@ -257,7 +263,7 @@
           <a:p>
             <a:fld id="{32D86F39-1B44-A741-99A2-48A7AC5FFBAB}" type="datetimeFigureOut">
               <a:rPr lang="en-IL" smtClean="0"/>
-              <a:t>16/08/2026</a:t>
+              <a:t>22/09/2026</a:t>
             </a:fld>
             <a:endParaRPr lang="en-IL"/>
           </a:p>
@@ -457,7 +463,7 @@
           <a:p>
             <a:fld id="{32D86F39-1B44-A741-99A2-48A7AC5FFBAB}" type="datetimeFigureOut">
               <a:rPr lang="en-IL" smtClean="0"/>
-              <a:t>16/08/2026</a:t>
+              <a:t>22/09/2026</a:t>
             </a:fld>
             <a:endParaRPr lang="en-IL"/>
           </a:p>
@@ -667,7 +673,7 @@
           <a:p>
             <a:fld id="{32D86F39-1B44-A741-99A2-48A7AC5FFBAB}" type="datetimeFigureOut">
               <a:rPr lang="en-IL" smtClean="0"/>
-              <a:t>16/08/2026</a:t>
+              <a:t>22/09/2026</a:t>
             </a:fld>
             <a:endParaRPr lang="en-IL"/>
           </a:p>
@@ -867,7 +873,7 @@
           <a:p>
             <a:fld id="{32D86F39-1B44-A741-99A2-48A7AC5FFBAB}" type="datetimeFigureOut">
               <a:rPr lang="en-IL" smtClean="0"/>
-              <a:t>16/08/2026</a:t>
+              <a:t>22/09/2026</a:t>
             </a:fld>
             <a:endParaRPr lang="en-IL"/>
           </a:p>
@@ -1143,7 +1149,7 @@
           <a:p>
             <a:fld id="{32D86F39-1B44-A741-99A2-48A7AC5FFBAB}" type="datetimeFigureOut">
               <a:rPr lang="en-IL" smtClean="0"/>
-              <a:t>16/08/2026</a:t>
+              <a:t>22/09/2026</a:t>
             </a:fld>
             <a:endParaRPr lang="en-IL"/>
           </a:p>
@@ -1411,7 +1417,7 @@
           <a:p>
             <a:fld id="{32D86F39-1B44-A741-99A2-48A7AC5FFBAB}" type="datetimeFigureOut">
               <a:rPr lang="en-IL" smtClean="0"/>
-              <a:t>16/08/2026</a:t>
+              <a:t>22/09/2026</a:t>
             </a:fld>
             <a:endParaRPr lang="en-IL"/>
           </a:p>
@@ -1826,7 +1832,7 @@
           <a:p>
             <a:fld id="{32D86F39-1B44-A741-99A2-48A7AC5FFBAB}" type="datetimeFigureOut">
               <a:rPr lang="en-IL" smtClean="0"/>
-              <a:t>16/08/2026</a:t>
+              <a:t>22/09/2026</a:t>
             </a:fld>
             <a:endParaRPr lang="en-IL"/>
           </a:p>
@@ -1968,7 +1974,7 @@
           <a:p>
             <a:fld id="{32D86F39-1B44-A741-99A2-48A7AC5FFBAB}" type="datetimeFigureOut">
               <a:rPr lang="en-IL" smtClean="0"/>
-              <a:t>16/08/2026</a:t>
+              <a:t>22/09/2026</a:t>
             </a:fld>
             <a:endParaRPr lang="en-IL"/>
           </a:p>
@@ -2081,7 +2087,7 @@
           <a:p>
             <a:fld id="{32D86F39-1B44-A741-99A2-48A7AC5FFBAB}" type="datetimeFigureOut">
               <a:rPr lang="en-IL" smtClean="0"/>
-              <a:t>16/08/2026</a:t>
+              <a:t>22/09/2026</a:t>
             </a:fld>
             <a:endParaRPr lang="en-IL"/>
           </a:p>
@@ -2394,7 +2400,7 @@
           <a:p>
             <a:fld id="{32D86F39-1B44-A741-99A2-48A7AC5FFBAB}" type="datetimeFigureOut">
               <a:rPr lang="en-IL" smtClean="0"/>
-              <a:t>16/08/2026</a:t>
+              <a:t>22/09/2026</a:t>
             </a:fld>
             <a:endParaRPr lang="en-IL"/>
           </a:p>
@@ -2683,7 +2689,7 @@
           <a:p>
             <a:fld id="{32D86F39-1B44-A741-99A2-48A7AC5FFBAB}" type="datetimeFigureOut">
               <a:rPr lang="en-IL" smtClean="0"/>
-              <a:t>16/08/2026</a:t>
+              <a:t>22/09/2026</a:t>
             </a:fld>
             <a:endParaRPr lang="en-IL"/>
           </a:p>
@@ -2926,7 +2932,7 @@
           <a:p>
             <a:fld id="{32D86F39-1B44-A741-99A2-48A7AC5FFBAB}" type="datetimeFigureOut">
               <a:rPr lang="en-IL" smtClean="0"/>
-              <a:t>16/08/2026</a:t>
+              <a:t>22/09/2026</a:t>
             </a:fld>
             <a:endParaRPr lang="en-IL"/>
           </a:p>
@@ -3345,10 +3351,10 @@
       </p:grpSpPr>
       <p:grpSp>
         <p:nvGrpSpPr>
-          <p:cNvPr id="18" name="Group 17">
-            <a:extLst>
-              <a:ext uri="{FF2B5EF4-FFF2-40B4-BE49-F238E27FC236}">
-                <a16:creationId xmlns:a16="http://schemas.microsoft.com/office/drawing/2014/main" id="{D15BAD85-457A-0E2F-538A-2305BEB586BB}"/>
+          <p:cNvPr id="15" name="Group 14">
+            <a:extLst>
+              <a:ext uri="{FF2B5EF4-FFF2-40B4-BE49-F238E27FC236}">
+                <a16:creationId xmlns:a16="http://schemas.microsoft.com/office/drawing/2014/main" id="{539D1571-5882-0D22-7E4F-2769D76B8E9D}"/>
               </a:ext>
             </a:extLst>
           </p:cNvPr>
@@ -3363,224 +3369,12 @@
             <a:chExt cx="10365981" cy="6195881"/>
           </a:xfrm>
         </p:grpSpPr>
-        <p:grpSp>
-          <p:nvGrpSpPr>
-            <p:cNvPr id="15" name="Group 14">
+        <p:pic>
+          <p:nvPicPr>
+            <p:cNvPr id="9" name="Picture 8">
               <a:extLst>
                 <a:ext uri="{FF2B5EF4-FFF2-40B4-BE49-F238E27FC236}">
-                  <a16:creationId xmlns:a16="http://schemas.microsoft.com/office/drawing/2014/main" id="{539D1571-5882-0D22-7E4F-2769D76B8E9D}"/>
-                </a:ext>
-              </a:extLst>
-            </p:cNvPr>
-            <p:cNvGrpSpPr/>
-            <p:nvPr/>
-          </p:nvGrpSpPr>
-          <p:grpSpPr>
-            <a:xfrm>
-              <a:off x="1116209" y="659135"/>
-              <a:ext cx="10365981" cy="6195881"/>
-              <a:chOff x="1116209" y="659135"/>
-              <a:chExt cx="10365981" cy="6195881"/>
-            </a:xfrm>
-          </p:grpSpPr>
-          <p:pic>
-            <p:nvPicPr>
-              <p:cNvPr id="9" name="Picture 8">
-                <a:extLst>
-                  <a:ext uri="{FF2B5EF4-FFF2-40B4-BE49-F238E27FC236}">
-                    <a16:creationId xmlns:a16="http://schemas.microsoft.com/office/drawing/2014/main" id="{6D001F20-F4D5-5C52-A6C7-DB839CCF483C}"/>
-                  </a:ext>
-                </a:extLst>
-              </p:cNvPr>
-              <p:cNvPicPr>
-                <a:picLocks noChangeAspect="1"/>
-              </p:cNvPicPr>
-              <p:nvPr/>
-            </p:nvPicPr>
-            <p:blipFill>
-              <a:blip r:embed="rId2"/>
-              <a:srcRect t="12731"/>
-              <a:stretch>
-                <a:fillRect/>
-              </a:stretch>
-            </p:blipFill>
-            <p:spPr>
-              <a:xfrm>
-                <a:off x="3836629" y="3860800"/>
-                <a:ext cx="4117200" cy="2994216"/>
-              </a:xfrm>
-              <a:prstGeom prst="rect">
-                <a:avLst/>
-              </a:prstGeom>
-            </p:spPr>
-          </p:pic>
-          <p:sp>
-            <p:nvSpPr>
-              <p:cNvPr id="12" name="TextBox 11">
-                <a:extLst>
-                  <a:ext uri="{FF2B5EF4-FFF2-40B4-BE49-F238E27FC236}">
-                    <a16:creationId xmlns:a16="http://schemas.microsoft.com/office/drawing/2014/main" id="{64B9C875-E86E-82B7-9093-783360CC07D5}"/>
-                  </a:ext>
-                </a:extLst>
-              </p:cNvPr>
-              <p:cNvSpPr txBox="1"/>
-              <p:nvPr/>
-            </p:nvSpPr>
-            <p:spPr>
-              <a:xfrm>
-                <a:off x="1116209" y="674125"/>
-                <a:ext cx="377371" cy="338554"/>
-              </a:xfrm>
-              <a:prstGeom prst="rect">
-                <a:avLst/>
-              </a:prstGeom>
-              <a:noFill/>
-            </p:spPr>
-            <p:txBody>
-              <a:bodyPr wrap="square" rtlCol="0">
-                <a:spAutoFit/>
-              </a:bodyPr>
-              <a:lstStyle/>
-              <a:p>
-                <a:pPr marL="0" defTabSz="914400" rtl="1" eaLnBrk="1" latinLnBrk="0" hangingPunct="1"/>
-                <a:r>
-                  <a:rPr lang="en-US" sz="1600" dirty="0">
-                    <a:latin typeface="Times New Roman" panose="02020603050405020304" pitchFamily="18" charset="0"/>
-                    <a:cs typeface="Times New Roman" panose="02020603050405020304" pitchFamily="18" charset="0"/>
-                  </a:rPr>
-                  <a:t>A</a:t>
-                </a:r>
-                <a:endParaRPr lang="en-IL" sz="1600" dirty="0">
-                  <a:latin typeface="Times New Roman" panose="02020603050405020304" pitchFamily="18" charset="0"/>
-                  <a:cs typeface="Times New Roman" panose="02020603050405020304" pitchFamily="18" charset="0"/>
-                </a:endParaRPr>
-              </a:p>
-            </p:txBody>
-          </p:sp>
-          <p:sp>
-            <p:nvSpPr>
-              <p:cNvPr id="13" name="TextBox 12">
-                <a:extLst>
-                  <a:ext uri="{FF2B5EF4-FFF2-40B4-BE49-F238E27FC236}">
-                    <a16:creationId xmlns:a16="http://schemas.microsoft.com/office/drawing/2014/main" id="{2AF7E202-C69C-4B74-3DBF-33396CF30E8D}"/>
-                  </a:ext>
-                </a:extLst>
-              </p:cNvPr>
-              <p:cNvSpPr txBox="1"/>
-              <p:nvPr/>
-            </p:nvSpPr>
-            <p:spPr>
-              <a:xfrm>
-                <a:off x="6096000" y="659135"/>
-                <a:ext cx="377371" cy="338554"/>
-              </a:xfrm>
-              <a:prstGeom prst="rect">
-                <a:avLst/>
-              </a:prstGeom>
-              <a:noFill/>
-            </p:spPr>
-            <p:txBody>
-              <a:bodyPr wrap="square" rtlCol="0">
-                <a:spAutoFit/>
-              </a:bodyPr>
-              <a:lstStyle/>
-              <a:p>
-                <a:pPr marL="0" defTabSz="914400" rtl="1" eaLnBrk="1" latinLnBrk="0" hangingPunct="1"/>
-                <a:r>
-                  <a:rPr lang="en-US" sz="1600" dirty="0">
-                    <a:latin typeface="Times New Roman" panose="02020603050405020304" pitchFamily="18" charset="0"/>
-                    <a:cs typeface="Times New Roman" panose="02020603050405020304" pitchFamily="18" charset="0"/>
-                  </a:rPr>
-                  <a:t>B</a:t>
-                </a:r>
-                <a:endParaRPr lang="en-IL" sz="1600" dirty="0">
-                  <a:latin typeface="Times New Roman" panose="02020603050405020304" pitchFamily="18" charset="0"/>
-                  <a:cs typeface="Times New Roman" panose="02020603050405020304" pitchFamily="18" charset="0"/>
-                </a:endParaRPr>
-              </a:p>
-            </p:txBody>
-          </p:sp>
-          <p:sp>
-            <p:nvSpPr>
-              <p:cNvPr id="14" name="TextBox 13">
-                <a:extLst>
-                  <a:ext uri="{FF2B5EF4-FFF2-40B4-BE49-F238E27FC236}">
-                    <a16:creationId xmlns:a16="http://schemas.microsoft.com/office/drawing/2014/main" id="{90955F1D-E870-0B84-E5E8-69DFA12BFF5D}"/>
-                  </a:ext>
-                </a:extLst>
-              </p:cNvPr>
-              <p:cNvSpPr txBox="1"/>
-              <p:nvPr/>
-            </p:nvSpPr>
-            <p:spPr>
-              <a:xfrm>
-                <a:off x="3705999" y="4060669"/>
-                <a:ext cx="377371" cy="338554"/>
-              </a:xfrm>
-              <a:prstGeom prst="rect">
-                <a:avLst/>
-              </a:prstGeom>
-              <a:noFill/>
-            </p:spPr>
-            <p:txBody>
-              <a:bodyPr wrap="square" rtlCol="0">
-                <a:spAutoFit/>
-              </a:bodyPr>
-              <a:lstStyle/>
-              <a:p>
-                <a:pPr marL="0" defTabSz="914400" rtl="1" eaLnBrk="1" latinLnBrk="0" hangingPunct="1"/>
-                <a:r>
-                  <a:rPr lang="en-US" sz="1600" dirty="0">
-                    <a:latin typeface="Times New Roman" panose="02020603050405020304" pitchFamily="18" charset="0"/>
-                    <a:cs typeface="Times New Roman" panose="02020603050405020304" pitchFamily="18" charset="0"/>
-                  </a:rPr>
-                  <a:t>C</a:t>
-                </a:r>
-                <a:endParaRPr lang="en-IL" sz="1600" dirty="0">
-                  <a:latin typeface="Times New Roman" panose="02020603050405020304" pitchFamily="18" charset="0"/>
-                  <a:cs typeface="Times New Roman" panose="02020603050405020304" pitchFamily="18" charset="0"/>
-                </a:endParaRPr>
-              </a:p>
-            </p:txBody>
-          </p:sp>
-          <p:pic>
-            <p:nvPicPr>
-              <p:cNvPr id="7" name="Picture 6">
-                <a:extLst>
-                  <a:ext uri="{FF2B5EF4-FFF2-40B4-BE49-F238E27FC236}">
-                    <a16:creationId xmlns:a16="http://schemas.microsoft.com/office/drawing/2014/main" id="{1AB85CD9-345A-4B8D-5A9B-1D7AA80C478D}"/>
-                  </a:ext>
-                </a:extLst>
-              </p:cNvPr>
-              <p:cNvPicPr>
-                <a:picLocks noChangeAspect="1"/>
-              </p:cNvPicPr>
-              <p:nvPr/>
-            </p:nvPicPr>
-            <p:blipFill>
-              <a:blip r:embed="rId3"/>
-              <a:srcRect b="15479"/>
-              <a:stretch>
-                <a:fillRect/>
-              </a:stretch>
-            </p:blipFill>
-            <p:spPr>
-              <a:xfrm>
-                <a:off x="6096000" y="1194968"/>
-                <a:ext cx="5386190" cy="3034978"/>
-              </a:xfrm>
-              <a:prstGeom prst="rect">
-                <a:avLst/>
-              </a:prstGeom>
-            </p:spPr>
-          </p:pic>
-        </p:grpSp>
-        <p:pic>
-          <p:nvPicPr>
-            <p:cNvPr id="17" name="Picture 16">
-              <a:extLst>
-                <a:ext uri="{FF2B5EF4-FFF2-40B4-BE49-F238E27FC236}">
-                  <a16:creationId xmlns:a16="http://schemas.microsoft.com/office/drawing/2014/main" id="{AFE9429E-58A3-20C4-C2BD-533F885424DD}"/>
+                  <a16:creationId xmlns:a16="http://schemas.microsoft.com/office/drawing/2014/main" id="{6D001F20-F4D5-5C52-A6C7-DB839CCF483C}"/>
                 </a:ext>
               </a:extLst>
             </p:cNvPr>
@@ -3590,15 +3384,176 @@
             <p:nvPr/>
           </p:nvPicPr>
           <p:blipFill>
-            <a:blip r:embed="rId4"/>
+            <a:blip r:embed="rId2"/>
+            <a:srcRect t="12731"/>
             <a:stretch>
               <a:fillRect/>
             </a:stretch>
           </p:blipFill>
           <p:spPr>
             <a:xfrm>
-              <a:off x="1493580" y="785560"/>
-              <a:ext cx="3727554" cy="3106295"/>
+              <a:off x="3836629" y="3860800"/>
+              <a:ext cx="4117200" cy="2994216"/>
+            </a:xfrm>
+            <a:prstGeom prst="rect">
+              <a:avLst/>
+            </a:prstGeom>
+          </p:spPr>
+        </p:pic>
+        <p:sp>
+          <p:nvSpPr>
+            <p:cNvPr id="12" name="TextBox 11">
+              <a:extLst>
+                <a:ext uri="{FF2B5EF4-FFF2-40B4-BE49-F238E27FC236}">
+                  <a16:creationId xmlns:a16="http://schemas.microsoft.com/office/drawing/2014/main" id="{64B9C875-E86E-82B7-9093-783360CC07D5}"/>
+                </a:ext>
+              </a:extLst>
+            </p:cNvPr>
+            <p:cNvSpPr txBox="1"/>
+            <p:nvPr/>
+          </p:nvSpPr>
+          <p:spPr>
+            <a:xfrm>
+              <a:off x="1116209" y="674125"/>
+              <a:ext cx="377371" cy="338554"/>
+            </a:xfrm>
+            <a:prstGeom prst="rect">
+              <a:avLst/>
+            </a:prstGeom>
+            <a:noFill/>
+          </p:spPr>
+          <p:txBody>
+            <a:bodyPr wrap="square" rtlCol="0">
+              <a:spAutoFit/>
+            </a:bodyPr>
+            <a:lstStyle/>
+            <a:p>
+              <a:pPr marL="0" defTabSz="914400" rtl="1" eaLnBrk="1" latinLnBrk="0" hangingPunct="1"/>
+              <a:r>
+                <a:rPr lang="en-US" sz="1600" dirty="0">
+                  <a:latin typeface="Times New Roman" panose="02020603050405020304" pitchFamily="18" charset="0"/>
+                  <a:cs typeface="Times New Roman" panose="02020603050405020304" pitchFamily="18" charset="0"/>
+                </a:rPr>
+                <a:t>A</a:t>
+              </a:r>
+              <a:endParaRPr lang="en-IL" sz="1600" dirty="0">
+                <a:latin typeface="Times New Roman" panose="02020603050405020304" pitchFamily="18" charset="0"/>
+                <a:cs typeface="Times New Roman" panose="02020603050405020304" pitchFamily="18" charset="0"/>
+              </a:endParaRPr>
+            </a:p>
+          </p:txBody>
+        </p:sp>
+        <p:sp>
+          <p:nvSpPr>
+            <p:cNvPr id="13" name="TextBox 12">
+              <a:extLst>
+                <a:ext uri="{FF2B5EF4-FFF2-40B4-BE49-F238E27FC236}">
+                  <a16:creationId xmlns:a16="http://schemas.microsoft.com/office/drawing/2014/main" id="{2AF7E202-C69C-4B74-3DBF-33396CF30E8D}"/>
+                </a:ext>
+              </a:extLst>
+            </p:cNvPr>
+            <p:cNvSpPr txBox="1"/>
+            <p:nvPr/>
+          </p:nvSpPr>
+          <p:spPr>
+            <a:xfrm>
+              <a:off x="6096000" y="659135"/>
+              <a:ext cx="377371" cy="338554"/>
+            </a:xfrm>
+            <a:prstGeom prst="rect">
+              <a:avLst/>
+            </a:prstGeom>
+            <a:noFill/>
+          </p:spPr>
+          <p:txBody>
+            <a:bodyPr wrap="square" rtlCol="0">
+              <a:spAutoFit/>
+            </a:bodyPr>
+            <a:lstStyle/>
+            <a:p>
+              <a:pPr marL="0" defTabSz="914400" rtl="1" eaLnBrk="1" latinLnBrk="0" hangingPunct="1"/>
+              <a:r>
+                <a:rPr lang="en-US" sz="1600" dirty="0">
+                  <a:latin typeface="Times New Roman" panose="02020603050405020304" pitchFamily="18" charset="0"/>
+                  <a:cs typeface="Times New Roman" panose="02020603050405020304" pitchFamily="18" charset="0"/>
+                </a:rPr>
+                <a:t>B</a:t>
+              </a:r>
+              <a:endParaRPr lang="en-IL" sz="1600" dirty="0">
+                <a:latin typeface="Times New Roman" panose="02020603050405020304" pitchFamily="18" charset="0"/>
+                <a:cs typeface="Times New Roman" panose="02020603050405020304" pitchFamily="18" charset="0"/>
+              </a:endParaRPr>
+            </a:p>
+          </p:txBody>
+        </p:sp>
+        <p:sp>
+          <p:nvSpPr>
+            <p:cNvPr id="14" name="TextBox 13">
+              <a:extLst>
+                <a:ext uri="{FF2B5EF4-FFF2-40B4-BE49-F238E27FC236}">
+                  <a16:creationId xmlns:a16="http://schemas.microsoft.com/office/drawing/2014/main" id="{90955F1D-E870-0B84-E5E8-69DFA12BFF5D}"/>
+                </a:ext>
+              </a:extLst>
+            </p:cNvPr>
+            <p:cNvSpPr txBox="1"/>
+            <p:nvPr/>
+          </p:nvSpPr>
+          <p:spPr>
+            <a:xfrm>
+              <a:off x="3705999" y="4060669"/>
+              <a:ext cx="377371" cy="338554"/>
+            </a:xfrm>
+            <a:prstGeom prst="rect">
+              <a:avLst/>
+            </a:prstGeom>
+            <a:noFill/>
+          </p:spPr>
+          <p:txBody>
+            <a:bodyPr wrap="square" rtlCol="0">
+              <a:spAutoFit/>
+            </a:bodyPr>
+            <a:lstStyle/>
+            <a:p>
+              <a:pPr marL="0" defTabSz="914400" rtl="1" eaLnBrk="1" latinLnBrk="0" hangingPunct="1"/>
+              <a:r>
+                <a:rPr lang="en-US" sz="1600" dirty="0">
+                  <a:latin typeface="Times New Roman" panose="02020603050405020304" pitchFamily="18" charset="0"/>
+                  <a:cs typeface="Times New Roman" panose="02020603050405020304" pitchFamily="18" charset="0"/>
+                </a:rPr>
+                <a:t>C</a:t>
+              </a:r>
+              <a:endParaRPr lang="en-IL" sz="1600" dirty="0">
+                <a:latin typeface="Times New Roman" panose="02020603050405020304" pitchFamily="18" charset="0"/>
+                <a:cs typeface="Times New Roman" panose="02020603050405020304" pitchFamily="18" charset="0"/>
+              </a:endParaRPr>
+            </a:p>
+          </p:txBody>
+        </p:sp>
+        <p:pic>
+          <p:nvPicPr>
+            <p:cNvPr id="7" name="Picture 6">
+              <a:extLst>
+                <a:ext uri="{FF2B5EF4-FFF2-40B4-BE49-F238E27FC236}">
+                  <a16:creationId xmlns:a16="http://schemas.microsoft.com/office/drawing/2014/main" id="{1AB85CD9-345A-4B8D-5A9B-1D7AA80C478D}"/>
+                </a:ext>
+              </a:extLst>
+            </p:cNvPr>
+            <p:cNvPicPr>
+              <a:picLocks noChangeAspect="1"/>
+            </p:cNvPicPr>
+            <p:nvPr/>
+          </p:nvPicPr>
+          <p:blipFill>
+            <a:blip r:embed="rId3"/>
+            <a:srcRect b="15479"/>
+            <a:stretch>
+              <a:fillRect/>
+            </a:stretch>
+          </p:blipFill>
+          <p:spPr>
+            <a:xfrm>
+              <a:off x="6096000" y="1194968"/>
+              <a:ext cx="5386190" cy="3034978"/>
             </a:xfrm>
             <a:prstGeom prst="rect">
               <a:avLst/>
@@ -3606,6 +3561,36 @@
           </p:spPr>
         </p:pic>
       </p:grpSp>
+      <p:pic>
+        <p:nvPicPr>
+          <p:cNvPr id="17" name="Picture 16">
+            <a:extLst>
+              <a:ext uri="{FF2B5EF4-FFF2-40B4-BE49-F238E27FC236}">
+                <a16:creationId xmlns:a16="http://schemas.microsoft.com/office/drawing/2014/main" id="{AFE9429E-58A3-20C4-C2BD-533F885424DD}"/>
+              </a:ext>
+            </a:extLst>
+          </p:cNvPr>
+          <p:cNvPicPr>
+            <a:picLocks noChangeAspect="1"/>
+          </p:cNvPicPr>
+          <p:nvPr/>
+        </p:nvPicPr>
+        <p:blipFill>
+          <a:blip r:embed="rId4"/>
+          <a:stretch>
+            <a:fillRect/>
+          </a:stretch>
+        </p:blipFill>
+        <p:spPr>
+          <a:xfrm>
+            <a:off x="1493580" y="785560"/>
+            <a:ext cx="3727554" cy="3106295"/>
+          </a:xfrm>
+          <a:prstGeom prst="rect">
+            <a:avLst/>
+          </a:prstGeom>
+        </p:spPr>
+      </p:pic>
     </p:spTree>
     <p:extLst>
       <p:ext uri="{BB962C8B-B14F-4D97-AF65-F5344CB8AC3E}">
@@ -3880,6 +3865,499 @@
     <p:extLst>
       <p:ext uri="{BB962C8B-B14F-4D97-AF65-F5344CB8AC3E}">
         <p14:creationId xmlns:p14="http://schemas.microsoft.com/office/powerpoint/2010/main" val="4108120393"/>
+      </p:ext>
+    </p:extLst>
+  </p:cSld>
+  <p:clrMapOvr>
+    <a:masterClrMapping/>
+  </p:clrMapOvr>
+</p:sld>
+</file>
+
+<file path=ppt/slides/slide3.xml><?xml version="1.0" encoding="utf-8"?>
+<p:sld xmlns:a="http://schemas.openxmlformats.org/drawingml/2006/main" xmlns:r="http://schemas.openxmlformats.org/officeDocument/2006/relationships" xmlns:p="http://schemas.openxmlformats.org/presentationml/2006/main">
+  <p:cSld>
+    <p:spTree>
+      <p:nvGrpSpPr>
+        <p:cNvPr id="1" name=""/>
+        <p:cNvGrpSpPr/>
+        <p:nvPr/>
+      </p:nvGrpSpPr>
+      <p:grpSpPr>
+        <a:xfrm>
+          <a:off x="0" y="0"/>
+          <a:ext cx="0" cy="0"/>
+          <a:chOff x="0" y="0"/>
+          <a:chExt cx="0" cy="0"/>
+        </a:xfrm>
+      </p:grpSpPr>
+      <p:grpSp>
+        <p:nvGrpSpPr>
+          <p:cNvPr id="34" name="Group 33">
+            <a:extLst>
+              <a:ext uri="{FF2B5EF4-FFF2-40B4-BE49-F238E27FC236}">
+                <a16:creationId xmlns:a16="http://schemas.microsoft.com/office/drawing/2014/main" id="{48E177AB-217E-16E9-5780-A4D2E9EFE70B}"/>
+              </a:ext>
+            </a:extLst>
+          </p:cNvPr>
+          <p:cNvGrpSpPr/>
+          <p:nvPr/>
+        </p:nvGrpSpPr>
+        <p:grpSpPr>
+          <a:xfrm>
+            <a:off x="1167966" y="210314"/>
+            <a:ext cx="8409587" cy="6413694"/>
+            <a:chOff x="1167966" y="210314"/>
+            <a:chExt cx="8409587" cy="6413694"/>
+          </a:xfrm>
+        </p:grpSpPr>
+        <p:pic>
+          <p:nvPicPr>
+            <p:cNvPr id="5" name="Picture 4">
+              <a:extLst>
+                <a:ext uri="{FF2B5EF4-FFF2-40B4-BE49-F238E27FC236}">
+                  <a16:creationId xmlns:a16="http://schemas.microsoft.com/office/drawing/2014/main" id="{AC07C2C2-9E78-E581-0A22-AA3DED4B06DD}"/>
+                </a:ext>
+              </a:extLst>
+            </p:cNvPr>
+            <p:cNvPicPr>
+              <a:picLocks noChangeAspect="1"/>
+            </p:cNvPicPr>
+            <p:nvPr/>
+          </p:nvPicPr>
+          <p:blipFill>
+            <a:blip r:embed="rId2"/>
+            <a:stretch>
+              <a:fillRect/>
+            </a:stretch>
+          </p:blipFill>
+          <p:spPr>
+            <a:xfrm>
+              <a:off x="1471447" y="548868"/>
+              <a:ext cx="2631595" cy="2192996"/>
+            </a:xfrm>
+            <a:prstGeom prst="rect">
+              <a:avLst/>
+            </a:prstGeom>
+          </p:spPr>
+        </p:pic>
+        <p:pic>
+          <p:nvPicPr>
+            <p:cNvPr id="7" name="Picture 6">
+              <a:extLst>
+                <a:ext uri="{FF2B5EF4-FFF2-40B4-BE49-F238E27FC236}">
+                  <a16:creationId xmlns:a16="http://schemas.microsoft.com/office/drawing/2014/main" id="{5E822F80-C7B1-1CE2-6E5F-B1A721655092}"/>
+                </a:ext>
+              </a:extLst>
+            </p:cNvPr>
+            <p:cNvPicPr>
+              <a:picLocks noChangeAspect="1"/>
+            </p:cNvPicPr>
+            <p:nvPr/>
+          </p:nvPicPr>
+          <p:blipFill>
+            <a:blip r:embed="rId3"/>
+            <a:srcRect b="15479"/>
+            <a:stretch>
+              <a:fillRect/>
+            </a:stretch>
+          </p:blipFill>
+          <p:spPr>
+            <a:xfrm>
+              <a:off x="1629103" y="2870742"/>
+              <a:ext cx="3434478" cy="1935239"/>
+            </a:xfrm>
+            <a:prstGeom prst="rect">
+              <a:avLst/>
+            </a:prstGeom>
+          </p:spPr>
+        </p:pic>
+        <p:pic>
+          <p:nvPicPr>
+            <p:cNvPr id="9" name="Picture 8">
+              <a:extLst>
+                <a:ext uri="{FF2B5EF4-FFF2-40B4-BE49-F238E27FC236}">
+                  <a16:creationId xmlns:a16="http://schemas.microsoft.com/office/drawing/2014/main" id="{C19CD4EA-DE2B-F589-1C02-C1A2047453B9}"/>
+                </a:ext>
+              </a:extLst>
+            </p:cNvPr>
+            <p:cNvPicPr>
+              <a:picLocks noChangeAspect="1"/>
+            </p:cNvPicPr>
+            <p:nvPr/>
+          </p:nvPicPr>
+          <p:blipFill>
+            <a:blip r:embed="rId4"/>
+            <a:srcRect t="12731" b="14188"/>
+            <a:stretch>
+              <a:fillRect/>
+            </a:stretch>
+          </p:blipFill>
+          <p:spPr>
+            <a:xfrm>
+              <a:off x="1545337" y="4944888"/>
+              <a:ext cx="2602274" cy="1584813"/>
+            </a:xfrm>
+            <a:prstGeom prst="rect">
+              <a:avLst/>
+            </a:prstGeom>
+          </p:spPr>
+        </p:pic>
+        <p:pic>
+          <p:nvPicPr>
+            <p:cNvPr id="15" name="Picture 14">
+              <a:extLst>
+                <a:ext uri="{FF2B5EF4-FFF2-40B4-BE49-F238E27FC236}">
+                  <a16:creationId xmlns:a16="http://schemas.microsoft.com/office/drawing/2014/main" id="{BB3AD3F2-D6E0-6E4C-8AD4-FDF7C599C8F6}"/>
+                </a:ext>
+              </a:extLst>
+            </p:cNvPr>
+            <p:cNvPicPr>
+              <a:picLocks noChangeAspect="1"/>
+            </p:cNvPicPr>
+            <p:nvPr/>
+          </p:nvPicPr>
+          <p:blipFill>
+            <a:blip r:embed="rId5"/>
+            <a:srcRect b="7555"/>
+            <a:stretch>
+              <a:fillRect/>
+            </a:stretch>
+          </p:blipFill>
+          <p:spPr>
+            <a:xfrm>
+              <a:off x="6224961" y="4727470"/>
+              <a:ext cx="2461839" cy="1896538"/>
+            </a:xfrm>
+            <a:prstGeom prst="rect">
+              <a:avLst/>
+            </a:prstGeom>
+          </p:spPr>
+        </p:pic>
+        <p:sp>
+          <p:nvSpPr>
+            <p:cNvPr id="17" name="TextBox 16">
+              <a:extLst>
+                <a:ext uri="{FF2B5EF4-FFF2-40B4-BE49-F238E27FC236}">
+                  <a16:creationId xmlns:a16="http://schemas.microsoft.com/office/drawing/2014/main" id="{461627A5-C6E4-F620-B979-2BB77F87F13E}"/>
+                </a:ext>
+              </a:extLst>
+            </p:cNvPr>
+            <p:cNvSpPr txBox="1"/>
+            <p:nvPr/>
+          </p:nvSpPr>
+          <p:spPr>
+            <a:xfrm>
+              <a:off x="1167967" y="210314"/>
+              <a:ext cx="377371" cy="276999"/>
+            </a:xfrm>
+            <a:prstGeom prst="rect">
+              <a:avLst/>
+            </a:prstGeom>
+            <a:noFill/>
+          </p:spPr>
+          <p:txBody>
+            <a:bodyPr wrap="square" rtlCol="0">
+              <a:spAutoFit/>
+            </a:bodyPr>
+            <a:lstStyle/>
+            <a:p>
+              <a:pPr marL="0" algn="r" defTabSz="914400" eaLnBrk="1" latinLnBrk="0" hangingPunct="1"/>
+              <a:r>
+                <a:rPr lang="en-US" sz="1200" dirty="0">
+                  <a:latin typeface="Times New Roman" panose="02020603050405020304" pitchFamily="18" charset="0"/>
+                  <a:cs typeface="Times New Roman" panose="02020603050405020304" pitchFamily="18" charset="0"/>
+                </a:rPr>
+                <a:t>A</a:t>
+              </a:r>
+              <a:endParaRPr lang="en-IL" sz="1200" dirty="0">
+                <a:latin typeface="Times New Roman" panose="02020603050405020304" pitchFamily="18" charset="0"/>
+                <a:cs typeface="Times New Roman" panose="02020603050405020304" pitchFamily="18" charset="0"/>
+              </a:endParaRPr>
+            </a:p>
+          </p:txBody>
+        </p:sp>
+        <p:sp>
+          <p:nvSpPr>
+            <p:cNvPr id="19" name="TextBox 18">
+              <a:extLst>
+                <a:ext uri="{FF2B5EF4-FFF2-40B4-BE49-F238E27FC236}">
+                  <a16:creationId xmlns:a16="http://schemas.microsoft.com/office/drawing/2014/main" id="{CF8A7DCD-B392-4703-161F-6CA0EBF401FD}"/>
+                </a:ext>
+              </a:extLst>
+            </p:cNvPr>
+            <p:cNvSpPr txBox="1"/>
+            <p:nvPr/>
+          </p:nvSpPr>
+          <p:spPr>
+            <a:xfrm>
+              <a:off x="1167967" y="3090446"/>
+              <a:ext cx="377371" cy="276999"/>
+            </a:xfrm>
+            <a:prstGeom prst="rect">
+              <a:avLst/>
+            </a:prstGeom>
+            <a:noFill/>
+          </p:spPr>
+          <p:txBody>
+            <a:bodyPr wrap="square" rtlCol="0">
+              <a:spAutoFit/>
+            </a:bodyPr>
+            <a:lstStyle/>
+            <a:p>
+              <a:pPr marL="0" algn="r" defTabSz="914400" eaLnBrk="1" latinLnBrk="0" hangingPunct="1"/>
+              <a:r>
+                <a:rPr lang="en-US" sz="1200" dirty="0">
+                  <a:latin typeface="Times New Roman" panose="02020603050405020304" pitchFamily="18" charset="0"/>
+                  <a:cs typeface="Times New Roman" panose="02020603050405020304" pitchFamily="18" charset="0"/>
+                </a:rPr>
+                <a:t>B</a:t>
+              </a:r>
+              <a:endParaRPr lang="en-IL" sz="1200" dirty="0">
+                <a:latin typeface="Times New Roman" panose="02020603050405020304" pitchFamily="18" charset="0"/>
+                <a:cs typeface="Times New Roman" panose="02020603050405020304" pitchFamily="18" charset="0"/>
+              </a:endParaRPr>
+            </a:p>
+          </p:txBody>
+        </p:sp>
+        <p:pic>
+          <p:nvPicPr>
+            <p:cNvPr id="23" name="Picture 22">
+              <a:extLst>
+                <a:ext uri="{FF2B5EF4-FFF2-40B4-BE49-F238E27FC236}">
+                  <a16:creationId xmlns:a16="http://schemas.microsoft.com/office/drawing/2014/main" id="{A5175AF3-49A6-6307-1FA5-317E9DAE66BC}"/>
+                </a:ext>
+              </a:extLst>
+            </p:cNvPr>
+            <p:cNvPicPr>
+              <a:picLocks noChangeAspect="1"/>
+            </p:cNvPicPr>
+            <p:nvPr/>
+          </p:nvPicPr>
+          <p:blipFill>
+            <a:blip r:embed="rId6"/>
+            <a:srcRect b="11824"/>
+            <a:stretch>
+              <a:fillRect/>
+            </a:stretch>
+          </p:blipFill>
+          <p:spPr>
+            <a:xfrm>
+              <a:off x="6412045" y="2996088"/>
+              <a:ext cx="3165508" cy="1860818"/>
+            </a:xfrm>
+            <a:prstGeom prst="rect">
+              <a:avLst/>
+            </a:prstGeom>
+          </p:spPr>
+        </p:pic>
+        <p:pic>
+          <p:nvPicPr>
+            <p:cNvPr id="25" name="Picture 24">
+              <a:extLst>
+                <a:ext uri="{FF2B5EF4-FFF2-40B4-BE49-F238E27FC236}">
+                  <a16:creationId xmlns:a16="http://schemas.microsoft.com/office/drawing/2014/main" id="{A5CF7424-B108-A12C-F9F5-43B23E1506E1}"/>
+                </a:ext>
+              </a:extLst>
+            </p:cNvPr>
+            <p:cNvPicPr>
+              <a:picLocks noChangeAspect="1"/>
+            </p:cNvPicPr>
+            <p:nvPr/>
+          </p:nvPicPr>
+          <p:blipFill>
+            <a:blip r:embed="rId7"/>
+            <a:stretch>
+              <a:fillRect/>
+            </a:stretch>
+          </p:blipFill>
+          <p:spPr>
+            <a:xfrm>
+              <a:off x="6224961" y="545617"/>
+              <a:ext cx="2631595" cy="2192996"/>
+            </a:xfrm>
+            <a:prstGeom prst="rect">
+              <a:avLst/>
+            </a:prstGeom>
+          </p:spPr>
+        </p:pic>
+        <p:sp>
+          <p:nvSpPr>
+            <p:cNvPr id="27" name="TextBox 26">
+              <a:extLst>
+                <a:ext uri="{FF2B5EF4-FFF2-40B4-BE49-F238E27FC236}">
+                  <a16:creationId xmlns:a16="http://schemas.microsoft.com/office/drawing/2014/main" id="{77894715-30DD-702F-B572-D856399D31EF}"/>
+                </a:ext>
+              </a:extLst>
+            </p:cNvPr>
+            <p:cNvSpPr txBox="1"/>
+            <p:nvPr/>
+          </p:nvSpPr>
+          <p:spPr>
+            <a:xfrm>
+              <a:off x="1167966" y="4944888"/>
+              <a:ext cx="377371" cy="276999"/>
+            </a:xfrm>
+            <a:prstGeom prst="rect">
+              <a:avLst/>
+            </a:prstGeom>
+            <a:noFill/>
+          </p:spPr>
+          <p:txBody>
+            <a:bodyPr wrap="square" rtlCol="0">
+              <a:spAutoFit/>
+            </a:bodyPr>
+            <a:lstStyle/>
+            <a:p>
+              <a:pPr marL="0" algn="r" defTabSz="914400" eaLnBrk="1" latinLnBrk="0" hangingPunct="1"/>
+              <a:r>
+                <a:rPr lang="en-US" sz="1200" dirty="0">
+                  <a:latin typeface="Times New Roman" panose="02020603050405020304" pitchFamily="18" charset="0"/>
+                  <a:cs typeface="Times New Roman" panose="02020603050405020304" pitchFamily="18" charset="0"/>
+                </a:rPr>
+                <a:t>C</a:t>
+              </a:r>
+              <a:endParaRPr lang="en-IL" sz="1200" dirty="0">
+                <a:latin typeface="Times New Roman" panose="02020603050405020304" pitchFamily="18" charset="0"/>
+                <a:cs typeface="Times New Roman" panose="02020603050405020304" pitchFamily="18" charset="0"/>
+              </a:endParaRPr>
+            </a:p>
+          </p:txBody>
+        </p:sp>
+        <p:sp>
+          <p:nvSpPr>
+            <p:cNvPr id="29" name="TextBox 28">
+              <a:extLst>
+                <a:ext uri="{FF2B5EF4-FFF2-40B4-BE49-F238E27FC236}">
+                  <a16:creationId xmlns:a16="http://schemas.microsoft.com/office/drawing/2014/main" id="{2F3D37C8-0630-E081-B487-8617439B7250}"/>
+                </a:ext>
+              </a:extLst>
+            </p:cNvPr>
+            <p:cNvSpPr txBox="1"/>
+            <p:nvPr/>
+          </p:nvSpPr>
+          <p:spPr>
+            <a:xfrm>
+              <a:off x="5822780" y="210314"/>
+              <a:ext cx="377371" cy="276999"/>
+            </a:xfrm>
+            <a:prstGeom prst="rect">
+              <a:avLst/>
+            </a:prstGeom>
+            <a:noFill/>
+          </p:spPr>
+          <p:txBody>
+            <a:bodyPr wrap="square" rtlCol="0">
+              <a:spAutoFit/>
+            </a:bodyPr>
+            <a:lstStyle/>
+            <a:p>
+              <a:pPr marL="0" algn="r" defTabSz="914400" eaLnBrk="1" latinLnBrk="0" hangingPunct="1"/>
+              <a:r>
+                <a:rPr lang="en-US" sz="1200" dirty="0">
+                  <a:latin typeface="Times New Roman" panose="02020603050405020304" pitchFamily="18" charset="0"/>
+                  <a:cs typeface="Times New Roman" panose="02020603050405020304" pitchFamily="18" charset="0"/>
+                </a:rPr>
+                <a:t>D</a:t>
+              </a:r>
+              <a:endParaRPr lang="en-IL" sz="1200" dirty="0">
+                <a:latin typeface="Times New Roman" panose="02020603050405020304" pitchFamily="18" charset="0"/>
+                <a:cs typeface="Times New Roman" panose="02020603050405020304" pitchFamily="18" charset="0"/>
+              </a:endParaRPr>
+            </a:p>
+          </p:txBody>
+        </p:sp>
+        <p:sp>
+          <p:nvSpPr>
+            <p:cNvPr id="31" name="TextBox 30">
+              <a:extLst>
+                <a:ext uri="{FF2B5EF4-FFF2-40B4-BE49-F238E27FC236}">
+                  <a16:creationId xmlns:a16="http://schemas.microsoft.com/office/drawing/2014/main" id="{74EAEF3E-75CD-0178-D791-30E114BC3223}"/>
+                </a:ext>
+              </a:extLst>
+            </p:cNvPr>
+            <p:cNvSpPr txBox="1"/>
+            <p:nvPr/>
+          </p:nvSpPr>
+          <p:spPr>
+            <a:xfrm>
+              <a:off x="5822780" y="3090446"/>
+              <a:ext cx="377371" cy="276999"/>
+            </a:xfrm>
+            <a:prstGeom prst="rect">
+              <a:avLst/>
+            </a:prstGeom>
+            <a:noFill/>
+          </p:spPr>
+          <p:txBody>
+            <a:bodyPr wrap="square" rtlCol="0">
+              <a:spAutoFit/>
+            </a:bodyPr>
+            <a:lstStyle/>
+            <a:p>
+              <a:pPr marL="0" algn="r" defTabSz="914400" eaLnBrk="1" latinLnBrk="0" hangingPunct="1"/>
+              <a:r>
+                <a:rPr lang="en-US" sz="1200" dirty="0">
+                  <a:latin typeface="Times New Roman" panose="02020603050405020304" pitchFamily="18" charset="0"/>
+                  <a:cs typeface="Times New Roman" panose="02020603050405020304" pitchFamily="18" charset="0"/>
+                </a:rPr>
+                <a:t>E</a:t>
+              </a:r>
+              <a:endParaRPr lang="en-IL" sz="1200" dirty="0">
+                <a:latin typeface="Times New Roman" panose="02020603050405020304" pitchFamily="18" charset="0"/>
+                <a:cs typeface="Times New Roman" panose="02020603050405020304" pitchFamily="18" charset="0"/>
+              </a:endParaRPr>
+            </a:p>
+          </p:txBody>
+        </p:sp>
+        <p:sp>
+          <p:nvSpPr>
+            <p:cNvPr id="33" name="TextBox 32">
+              <a:extLst>
+                <a:ext uri="{FF2B5EF4-FFF2-40B4-BE49-F238E27FC236}">
+                  <a16:creationId xmlns:a16="http://schemas.microsoft.com/office/drawing/2014/main" id="{42C0B750-E930-A0AE-6947-B961F318CA31}"/>
+                </a:ext>
+              </a:extLst>
+            </p:cNvPr>
+            <p:cNvSpPr txBox="1"/>
+            <p:nvPr/>
+          </p:nvSpPr>
+          <p:spPr>
+            <a:xfrm>
+              <a:off x="5822779" y="4944888"/>
+              <a:ext cx="377371" cy="276999"/>
+            </a:xfrm>
+            <a:prstGeom prst="rect">
+              <a:avLst/>
+            </a:prstGeom>
+            <a:noFill/>
+          </p:spPr>
+          <p:txBody>
+            <a:bodyPr wrap="square" rtlCol="0">
+              <a:spAutoFit/>
+            </a:bodyPr>
+            <a:lstStyle/>
+            <a:p>
+              <a:pPr marL="0" algn="r" defTabSz="914400" eaLnBrk="1" latinLnBrk="0" hangingPunct="1"/>
+              <a:r>
+                <a:rPr lang="en-US" sz="1200" dirty="0">
+                  <a:latin typeface="Times New Roman" panose="02020603050405020304" pitchFamily="18" charset="0"/>
+                  <a:cs typeface="Times New Roman" panose="02020603050405020304" pitchFamily="18" charset="0"/>
+                </a:rPr>
+                <a:t>F</a:t>
+              </a:r>
+              <a:endParaRPr lang="en-IL" sz="1200" dirty="0">
+                <a:latin typeface="Times New Roman" panose="02020603050405020304" pitchFamily="18" charset="0"/>
+                <a:cs typeface="Times New Roman" panose="02020603050405020304" pitchFamily="18" charset="0"/>
+              </a:endParaRPr>
+            </a:p>
+          </p:txBody>
+        </p:sp>
+      </p:grpSp>
+    </p:spTree>
+    <p:extLst>
+      <p:ext uri="{BB962C8B-B14F-4D97-AF65-F5344CB8AC3E}">
+        <p14:creationId xmlns:p14="http://schemas.microsoft.com/office/powerpoint/2010/main" val="96720196"/>
       </p:ext>
     </p:extLst>
   </p:cSld>
